--- a/Capstone.pptx
+++ b/Capstone.pptx
@@ -1578,6 +1578,13 @@
           </a:solidFill>
           <a:ln/>
         </p:spPr>
+        <p:txBody>
+          <a:bodyPr/>
+          <a:lstStyle/>
+          <a:p>
+            <a:endParaRPr lang="en-US"/>
+          </a:p>
+        </p:txBody>
       </p:sp>
       <p:sp>
         <p:nvSpPr>
@@ -3022,8 +3029,8 @@
         </p:nvSpPr>
         <p:spPr>
           <a:xfrm>
-            <a:off x="502920" y="1207008"/>
-            <a:ext cx="45720" cy="960120"/>
+            <a:off x="4846320" y="1207008"/>
+            <a:ext cx="45720" cy="792480"/>
           </a:xfrm>
           <a:prstGeom prst="rect">
             <a:avLst/>
@@ -3054,8 +3061,8 @@
         </p:nvSpPr>
         <p:spPr>
           <a:xfrm>
-            <a:off x="777240" y="1188720"/>
-            <a:ext cx="2286000" cy="329184"/>
+            <a:off x="5120640" y="1188720"/>
+            <a:ext cx="3520440" cy="310000"/>
           </a:xfrm>
           <a:prstGeom prst="rect">
             <a:avLst/>
@@ -3071,7 +3078,7 @@
               <a:buNone/>
             </a:pPr>
             <a:r>
-              <a:rPr lang="en-US" sz="1700" b="1" dirty="0">
+              <a:rPr lang="en-US" sz="1500" b="1">
                 <a:solidFill>
                   <a:srgbClr val="FFFFFF"/>
                 </a:solidFill>
@@ -3093,8 +3100,8 @@
         </p:nvSpPr>
         <p:spPr>
           <a:xfrm>
-            <a:off x="777240" y="1508760"/>
-            <a:ext cx="2286000" cy="256032"/>
+            <a:off x="5120640" y="1498760"/>
+            <a:ext cx="3520440" cy="230000"/>
           </a:xfrm>
           <a:prstGeom prst="rect">
             <a:avLst/>
@@ -3129,8 +3136,8 @@
         </p:nvSpPr>
         <p:spPr>
           <a:xfrm>
-            <a:off x="3291840" y="1225296"/>
-            <a:ext cx="5349240" cy="868680"/>
+            <a:off x="5120640" y="1750000"/>
+            <a:ext cx="3520440" cy="520000"/>
           </a:xfrm>
           <a:prstGeom prst="rect">
             <a:avLst/>
@@ -3144,19 +3151,19 @@
           <a:p>
             <a:pPr marL="0" indent="0">
               <a:lnSpc>
-                <a:spcPts val="1600"/>
+                <a:spcPts val="1300"/>
               </a:lnSpc>
               <a:buNone/>
             </a:pPr>
             <a:r>
-              <a:rPr lang="en-US" sz="1200" dirty="0">
+              <a:rPr lang="en-US" sz="1050">
                 <a:solidFill>
                   <a:srgbClr val="AFBDD1"/>
                 </a:solidFill>
               </a:rPr>
               <a:t>Strongest percentage price appreciation. Entry-level price points allowed rapid percentage gains as spillover buyers sought affordability outside Davidson.</a:t>
             </a:r>
-            <a:endParaRPr lang="en-US" sz="1200" dirty="0"/>
+            <a:endParaRPr lang="en-US" sz="1050"/>
           </a:p>
         </p:txBody>
       </p:sp>
@@ -3174,8 +3181,8 @@
         </p:nvSpPr>
         <p:spPr>
           <a:xfrm>
-            <a:off x="502920" y="2340864"/>
-            <a:ext cx="45720" cy="960120"/>
+            <a:off x="4846320" y="2350008"/>
+            <a:ext cx="45720" cy="792480"/>
           </a:xfrm>
           <a:prstGeom prst="rect">
             <a:avLst/>
@@ -3206,8 +3213,8 @@
         </p:nvSpPr>
         <p:spPr>
           <a:xfrm>
-            <a:off x="777240" y="2322576"/>
-            <a:ext cx="2286000" cy="329184"/>
+            <a:off x="5120640" y="2331720"/>
+            <a:ext cx="3520440" cy="310000"/>
           </a:xfrm>
           <a:prstGeom prst="rect">
             <a:avLst/>
@@ -3223,7 +3230,7 @@
               <a:buNone/>
             </a:pPr>
             <a:r>
-              <a:rPr lang="en-US" sz="1700" b="1" dirty="0">
+              <a:rPr lang="en-US" sz="1500" b="1">
                 <a:solidFill>
                   <a:srgbClr val="FFFFFF"/>
                 </a:solidFill>
@@ -3245,8 +3252,8 @@
         </p:nvSpPr>
         <p:spPr>
           <a:xfrm>
-            <a:off x="777240" y="2642616"/>
-            <a:ext cx="2286000" cy="256032"/>
+            <a:off x="5120640" y="2641760"/>
+            <a:ext cx="3520440" cy="230000"/>
           </a:xfrm>
           <a:prstGeom prst="rect">
             <a:avLst/>
@@ -3281,8 +3288,8 @@
         </p:nvSpPr>
         <p:spPr>
           <a:xfrm>
-            <a:off x="3291840" y="2359152"/>
-            <a:ext cx="5349240" cy="868680"/>
+            <a:off x="5120640" y="2893000"/>
+            <a:ext cx="3520440" cy="520000"/>
           </a:xfrm>
           <a:prstGeom prst="rect">
             <a:avLst/>
@@ -3296,19 +3303,19 @@
           <a:p>
             <a:pPr marL="0" indent="0">
               <a:lnSpc>
-                <a:spcPts val="1600"/>
+                <a:spcPts val="1300"/>
               </a:lnSpc>
               <a:buNone/>
             </a:pPr>
             <a:r>
-              <a:rPr lang="en-US" sz="1200" dirty="0">
+              <a:rPr lang="en-US" sz="1050">
                 <a:solidFill>
                   <a:srgbClr val="AFBDD1"/>
                 </a:solidFill>
               </a:rPr>
               <a:t>Highest overall dollar prices ($900k+ median), maintaining high appreciation totals on an absolute dollar basis.</a:t>
             </a:r>
-            <a:endParaRPr lang="en-US" sz="1200" dirty="0"/>
+            <a:endParaRPr lang="en-US" sz="1050"/>
           </a:p>
         </p:txBody>
       </p:sp>
@@ -3326,8 +3333,8 @@
         </p:nvSpPr>
         <p:spPr>
           <a:xfrm>
-            <a:off x="502920" y="3474720"/>
-            <a:ext cx="45720" cy="960120"/>
+            <a:off x="4846320" y="3493008"/>
+            <a:ext cx="45720" cy="792480"/>
           </a:xfrm>
           <a:prstGeom prst="rect">
             <a:avLst/>
@@ -3358,8 +3365,8 @@
         </p:nvSpPr>
         <p:spPr>
           <a:xfrm>
-            <a:off x="777240" y="3456432"/>
-            <a:ext cx="2286000" cy="329184"/>
+            <a:off x="5120640" y="3474720"/>
+            <a:ext cx="3520440" cy="310000"/>
           </a:xfrm>
           <a:prstGeom prst="rect">
             <a:avLst/>
@@ -3375,7 +3382,7 @@
               <a:buNone/>
             </a:pPr>
             <a:r>
-              <a:rPr lang="en-US" sz="1700" b="1" dirty="0">
+              <a:rPr lang="en-US" sz="1500" b="1">
                 <a:solidFill>
                   <a:srgbClr val="FFFFFF"/>
                 </a:solidFill>
@@ -3397,8 +3404,8 @@
         </p:nvSpPr>
         <p:spPr>
           <a:xfrm>
-            <a:off x="777240" y="3776472"/>
-            <a:ext cx="2286000" cy="256032"/>
+            <a:off x="5120640" y="3784760"/>
+            <a:ext cx="3520440" cy="230000"/>
           </a:xfrm>
           <a:prstGeom prst="rect">
             <a:avLst/>
@@ -3433,8 +3440,8 @@
         </p:nvSpPr>
         <p:spPr>
           <a:xfrm>
-            <a:off x="3291840" y="3493008"/>
-            <a:ext cx="5349240" cy="868680"/>
+            <a:off x="5120640" y="4036000"/>
+            <a:ext cx="3520440" cy="520000"/>
           </a:xfrm>
           <a:prstGeom prst="rect">
             <a:avLst/>
@@ -3448,19 +3455,19 @@
           <a:p>
             <a:pPr marL="0" indent="0">
               <a:lnSpc>
-                <a:spcPts val="1600"/>
+                <a:spcPts val="1300"/>
               </a:lnSpc>
               <a:buNone/>
             </a:pPr>
             <a:r>
-              <a:rPr lang="en-US" sz="1200" dirty="0">
+              <a:rPr lang="en-US" sz="1050">
                 <a:solidFill>
                   <a:srgbClr val="AFBDD1"/>
                 </a:solidFill>
               </a:rPr>
               <a:t>Slower relative appreciation rates due to higher initial price baselines and rising inventory levels.</a:t>
             </a:r>
-            <a:endParaRPr lang="en-US" sz="1200" dirty="0"/>
+            <a:endParaRPr lang="en-US" sz="1050"/>
           </a:p>
         </p:txBody>
       </p:sp>
@@ -3497,6 +3504,66 @@
               <a:t>Middle Tennessee Residential Market Analysis  |  3</a:t>
             </a:r>
             <a:endParaRPr lang="en-US" sz="900" dirty="0"/>
+          </a:p>
+        </p:txBody>
+      </p:sp>
+      <p:pic>
+        <p:nvPicPr>
+          <p:cNvPr id="20" name="Housing price index chart" descr="Line chart of the Middle Tennessee housing price index rising from 407.16 in March 2020 to 704.14 in March 2026, with the steepest gains between 2021 and 2022."/>
+          <p:cNvPicPr>
+            <a:picLocks noChangeAspect="1"/>
+          </p:cNvPicPr>
+          <p:nvPr/>
+        </p:nvPicPr>
+        <p:blipFill>
+          <a:blip r:embed="rId3"/>
+          <a:stretch>
+            <a:fillRect/>
+          </a:stretch>
+        </p:blipFill>
+        <p:spPr>
+          <a:xfrm>
+            <a:off x="502920" y="1188720"/>
+            <a:ext cx="4160520" cy="3200400"/>
+          </a:xfrm>
+          <a:prstGeom prst="rect">
+            <a:avLst/>
+          </a:prstGeom>
+        </p:spPr>
+      </p:pic>
+      <p:sp>
+        <p:nvSpPr>
+          <p:cNvPr id="21" name="Chart caption"/>
+          <p:cNvSpPr/>
+          <p:nvPr/>
+        </p:nvSpPr>
+        <p:spPr>
+          <a:xfrm>
+            <a:off x="502920" y="4420000"/>
+            <a:ext cx="4160520" cy="230000"/>
+          </a:xfrm>
+          <a:prstGeom prst="rect">
+            <a:avLst/>
+          </a:prstGeom>
+          <a:noFill/>
+          <a:ln/>
+        </p:spPr>
+        <p:txBody>
+          <a:bodyPr wrap="square" lIns="0" tIns="0" rIns="0" bIns="0" rtlCol="0" anchor="ctr"/>
+          <a:lstStyle/>
+          <a:p>
+            <a:pPr marL="0" indent="0">
+              <a:buNone/>
+            </a:pPr>
+            <a:r>
+              <a:rPr lang="en-US" sz="900">
+                <a:solidFill>
+                  <a:srgbClr val="AFBDD1"/>
+                </a:solidFill>
+              </a:rPr>
+              <a:t>Housing Price Index, Mar 2020 – Mar 2026: 407.16 → 704.14</a:t>
+            </a:r>
+            <a:endParaRPr lang="en-US" sz="900"/>
           </a:p>
         </p:txBody>
       </p:sp>
